--- a/skills/presentations/assets/pptx/templates/01-technical-review.pptx
+++ b/skills/presentations/assets/pptx/templates/01-technical-review.pptx
@@ -5,16 +5,16 @@
     <p:sldMasterId xmlns:r="http://schemas.openxmlformats.org/officeDocument/2006/relationships" id="2147483648" r:id="rId1"/>
   </p:sldMasterIdLst>
   <p:notesMasterIdLst>
-    <p:notesMasterId r:id="Rd6b6f722d80543bf"/>
+    <p:notesMasterId r:id="R1759c7c84c2242bb"/>
   </p:notesMasterIdLst>
   <p:sldIdLst>
-    <p:sldId id="256" r:id="R60d454837e7b410b"/>
-    <p:sldId id="257" r:id="R9770aff3e0e44afe"/>
-    <p:sldId id="258" r:id="Rc6c82161ecb6408b"/>
-    <p:sldId id="259" r:id="R9fcd697c0531488a"/>
-    <p:sldId id="260" r:id="R6b24aa1429f947e9"/>
-    <p:sldId id="261" r:id="R89f004ecfdba48d5"/>
-    <p:sldId id="262" r:id="R9a04f1e9802240ca"/>
+    <p:sldId id="256" r:id="Rbb47a64ce4f74467"/>
+    <p:sldId id="257" r:id="R20c45667099542a6"/>
+    <p:sldId id="258" r:id="Ra67c8ad3a01747e3"/>
+    <p:sldId id="259" r:id="R5e29cb400372431b"/>
+    <p:sldId id="260" r:id="R546c7adefb274282"/>
+    <p:sldId id="261" r:id="R4937d9c4f60647b8"/>
+    <p:sldId id="262" r:id="Re8c6e985fd784b46"/>
   </p:sldIdLst>
   <p:sldSz cx="12192000" cy="6858000"/>
   <p:notesSz cx="6858000" cy="9144000"/>

--- a/skills/presentations/assets/pptx/templates/01-technical-review.pptx
+++ b/skills/presentations/assets/pptx/templates/01-technical-review.pptx
@@ -5,16 +5,17 @@
     <p:sldMasterId xmlns:r="http://schemas.openxmlformats.org/officeDocument/2006/relationships" id="2147483648" r:id="rId1"/>
   </p:sldMasterIdLst>
   <p:notesMasterIdLst>
-    <p:notesMasterId r:id="R1759c7c84c2242bb"/>
+    <p:notesMasterId r:id="Re4e29a20510c4cf2"/>
   </p:notesMasterIdLst>
   <p:sldIdLst>
-    <p:sldId id="256" r:id="Rbb47a64ce4f74467"/>
-    <p:sldId id="257" r:id="R20c45667099542a6"/>
-    <p:sldId id="258" r:id="Ra67c8ad3a01747e3"/>
-    <p:sldId id="259" r:id="R5e29cb400372431b"/>
-    <p:sldId id="260" r:id="R546c7adefb274282"/>
-    <p:sldId id="261" r:id="R4937d9c4f60647b8"/>
-    <p:sldId id="262" r:id="Re8c6e985fd784b46"/>
+    <p:sldId id="256" r:id="Rc493580404c142de"/>
+    <p:sldId id="257" r:id="R30a1b1548477498e"/>
+    <p:sldId id="258" r:id="Rf06d30fcef5d459b"/>
+    <p:sldId id="259" r:id="R9dfd551c33a040a5"/>
+    <p:sldId id="260" r:id="R35b3c9c39fa0410f"/>
+    <p:sldId id="261" r:id="R4f947e2e6aed4849"/>
+    <p:sldId id="262" r:id="R7e9c3d3db7dc4d08"/>
+    <p:sldId id="263" r:id="Rca92b01bf5f748de"/>
   </p:sldIdLst>
   <p:sldSz cx="12192000" cy="6858000"/>
   <p:notesSz cx="6858000" cy="9144000"/>
@@ -480,6 +481,30 @@
               <a:t>Cover (template). Technical review: decision package</a:t>
             </a:r>
           </a:p>
+          <a:p xmlns:a="http://schemas.openxmlformats.org/drawingml/2006/main">
+            <a:r>
+              <a:rPr lang="en-US"/>
+              <a:t/>
+            </a:r>
+          </a:p>
+          <a:p xmlns:a="http://schemas.openxmlformats.org/drawingml/2006/main">
+            <a:r>
+              <a:rPr lang="en-US"/>
+              <a:t>Design-doc / RFC options table + residual risk</a:t>
+            </a:r>
+          </a:p>
+          <a:p xmlns:a="http://schemas.openxmlformats.org/drawingml/2006/main">
+            <a:r>
+              <a:rPr lang="en-US"/>
+              <a:t>StaffEng — Writing engineering strategy: https://staffeng.com/guides/engineering-strategy/</a:t>
+            </a:r>
+          </a:p>
+          <a:p xmlns:a="http://schemas.openxmlformats.org/drawingml/2006/main">
+            <a:r>
+              <a:rPr lang="en-US"/>
+              <a:t>Utterskills — options instead of single conclusion: https://utterskills.com/blog/communication-skills-for-software-engineers</a:t>
+            </a:r>
+          </a:p>
         </p:txBody>
       </p:sp>
     </p:spTree>
@@ -532,7 +557,19 @@
           <a:p xmlns:a="http://schemas.openxmlformats.org/drawingml/2006/main">
             <a:r>
               <a:rPr lang="en-US"/>
-              <a:t>Close with decision sentence. Capture owner and date live.</a:t>
+              <a:t>Design-doc / RFC options table + residual risk</a:t>
+            </a:r>
+          </a:p>
+          <a:p xmlns:a="http://schemas.openxmlformats.org/drawingml/2006/main">
+            <a:r>
+              <a:rPr lang="en-US"/>
+              <a:t>StaffEng — Writing engineering strategy: https://staffeng.com/guides/engineering-strategy/</a:t>
+            </a:r>
+          </a:p>
+          <a:p xmlns:a="http://schemas.openxmlformats.org/drawingml/2006/main">
+            <a:r>
+              <a:rPr lang="en-US"/>
+              <a:t>Utterskills — options instead of single conclusion: https://utterskills.com/blog/communication-skills-for-software-engineers</a:t>
             </a:r>
           </a:p>
         </p:txBody>
@@ -587,7 +624,7 @@
           <a:p xmlns:a="http://schemas.openxmlformats.org/drawingml/2006/main">
             <a:r>
               <a:rPr lang="en-US"/>
-              <a:t>State constraints before solution.</a:t>
+              <a:t>Close with decision sentence. Capture owner and date live.</a:t>
             </a:r>
           </a:p>
         </p:txBody>
@@ -642,7 +679,7 @@
           <a:p xmlns:a="http://schemas.openxmlformats.org/drawingml/2006/main">
             <a:r>
               <a:rPr lang="en-US"/>
-              <a:t>One visual idea; deep-dive only on request.</a:t>
+              <a:t>State constraints before solution.</a:t>
             </a:r>
           </a:p>
         </p:txBody>
@@ -697,7 +734,7 @@
           <a:p xmlns:a="http://schemas.openxmlformats.org/drawingml/2006/main">
             <a:r>
               <a:rPr lang="en-US"/>
-              <a:t>Every risk needs an owner.</a:t>
+              <a:t>One visual idea; deep-dive only on request.</a:t>
             </a:r>
           </a:p>
         </p:txBody>
@@ -752,7 +789,7 @@
           <a:p xmlns:a="http://schemas.openxmlformats.org/drawingml/2006/main">
             <a:r>
               <a:rPr lang="en-US"/>
-              <a:t>Walk trade-offs; land recommendation.</a:t>
+              <a:t>Every risk needs an owner.</a:t>
             </a:r>
           </a:p>
         </p:txBody>
@@ -766,6 +803,61 @@
 </file>
 
 <file path=ppt/notesSlides/notesSlide7.xml><?xml version="1.0" encoding="utf-8"?>
+<p:notes xmlns:p="http://schemas.openxmlformats.org/presentationml/2006/main">
+  <p:cSld>
+    <p:spTree>
+      <p:nvGrpSpPr>
+        <p:cNvPr id="1" name=""/>
+        <p:cNvGrpSpPr/>
+        <p:nvPr/>
+      </p:nvGrpSpPr>
+      <p:grpSpPr>
+        <a:xfrm xmlns:a="http://schemas.openxmlformats.org/drawingml/2006/main"/>
+      </p:grpSpPr>
+      <p:sp>
+        <p:nvSpPr>
+          <p:cNvPr id="2" name="Slide Image Placeholder 1"/>
+          <p:cNvSpPr/>
+          <p:nvPr>
+            <p:ph type="sldImg" idx="0"/>
+          </p:nvPr>
+        </p:nvSpPr>
+        <p:spPr/>
+        <p:txBody>
+          <a:bodyPr xmlns:a="http://schemas.openxmlformats.org/drawingml/2006/main"/>
+          <a:lstStyle xmlns:a="http://schemas.openxmlformats.org/drawingml/2006/main"/>
+          <a:p xmlns:a="http://schemas.openxmlformats.org/drawingml/2006/main"/>
+        </p:txBody>
+      </p:sp>
+      <p:sp>
+        <p:nvSpPr>
+          <p:cNvPr id="3" name="Notes Placeholder 2"/>
+          <p:cNvSpPr/>
+          <p:nvPr>
+            <p:ph type="body" idx="1"/>
+          </p:nvPr>
+        </p:nvSpPr>
+        <p:spPr/>
+        <p:txBody>
+          <a:bodyPr xmlns:a="http://schemas.openxmlformats.org/drawingml/2006/main"/>
+          <a:lstStyle xmlns:a="http://schemas.openxmlformats.org/drawingml/2006/main"/>
+          <a:p xmlns:a="http://schemas.openxmlformats.org/drawingml/2006/main">
+            <a:r>
+              <a:rPr lang="en-US"/>
+              <a:t>Walk trade-offs; land recommendation.</a:t>
+            </a:r>
+          </a:p>
+        </p:txBody>
+      </p:sp>
+    </p:spTree>
+  </p:cSld>
+  <p:clrMapOvr>
+    <a:masterClrMapping xmlns:a="http://schemas.openxmlformats.org/drawingml/2006/main"/>
+  </p:clrMapOvr>
+</p:notes>
+</file>
+
+<file path=ppt/notesSlides/notesSlide8.xml><?xml version="1.0" encoding="utf-8"?>
 <p:notes xmlns:p="http://schemas.openxmlformats.org/presentationml/2006/main">
   <p:cSld>
     <p:spTree>
@@ -1135,8 +1227,8 @@
         </p:nvSpPr>
         <p:spPr>
           <a:xfrm xmlns:a="http://schemas.openxmlformats.org/drawingml/2006/main">
-            <a:off x="504000" y="1008000"/>
-            <a:ext cx="11088000" cy="324000"/>
+            <a:off x="504000" y="936000"/>
+            <a:ext cx="11088000" cy="306000"/>
           </a:xfrm>
           <a:prstGeom xmlns:a="http://schemas.openxmlformats.org/drawingml/2006/main" prst="rect">
             <a:avLst/>
@@ -1167,8 +1259,8 @@
         </p:nvSpPr>
         <p:spPr>
           <a:xfrm xmlns:a="http://schemas.openxmlformats.org/drawingml/2006/main">
-            <a:off x="504000" y="1440000"/>
-            <a:ext cx="11088000" cy="936000"/>
+            <a:off x="504000" y="1332000"/>
+            <a:ext cx="11088000" cy="900000"/>
           </a:xfrm>
           <a:prstGeom xmlns:a="http://schemas.openxmlformats.org/drawingml/2006/main" prst="rect">
             <a:avLst/>
@@ -1179,7 +1271,7 @@
           <a:lstStyle xmlns:a="http://schemas.openxmlformats.org/drawingml/2006/main"/>
           <a:p xmlns:a="http://schemas.openxmlformats.org/drawingml/2006/main">
             <a:r>
-              <a:rPr lang="en-US" sz="3400" b="1">
+              <a:rPr lang="en-US" sz="3200" b="1">
                 <a:solidFill>
                   <a:srgbClr val="FFFFFF"/>
                 </a:solidFill>
@@ -1199,8 +1291,8 @@
         </p:nvSpPr>
         <p:spPr>
           <a:xfrm xmlns:a="http://schemas.openxmlformats.org/drawingml/2006/main">
-            <a:off x="504000" y="2520000"/>
-            <a:ext cx="11088000" cy="720000"/>
+            <a:off x="504000" y="2340000"/>
+            <a:ext cx="11088000" cy="648000"/>
           </a:xfrm>
           <a:prstGeom xmlns:a="http://schemas.openxmlformats.org/drawingml/2006/main" prst="rect">
             <a:avLst/>
@@ -1211,7 +1303,7 @@
           <a:lstStyle xmlns:a="http://schemas.openxmlformats.org/drawingml/2006/main"/>
           <a:p xmlns:a="http://schemas.openxmlformats.org/drawingml/2006/main">
             <a:r>
-              <a:rPr lang="en-US" sz="1700" b="0">
+              <a:rPr lang="en-US" sz="1600" b="0">
                 <a:solidFill>
                   <a:srgbClr val="CADCFC"/>
                 </a:solidFill>
@@ -1226,6 +1318,38 @@
       <p:sp>
         <p:nvSpPr>
           <p:cNvPr id="100003" name="TextBox 4"/>
+          <p:cNvSpPr txBox="1"/>
+          <p:nvPr/>
+        </p:nvSpPr>
+        <p:spPr>
+          <a:xfrm xmlns:a="http://schemas.openxmlformats.org/drawingml/2006/main">
+            <a:off x="504000" y="3240000"/>
+            <a:ext cx="11088000" cy="576000"/>
+          </a:xfrm>
+          <a:prstGeom xmlns:a="http://schemas.openxmlformats.org/drawingml/2006/main" prst="rect">
+            <a:avLst/>
+          </a:prstGeom>
+        </p:spPr>
+        <p:txBody>
+          <a:bodyPr xmlns:a="http://schemas.openxmlformats.org/drawingml/2006/main"/>
+          <a:lstStyle xmlns:a="http://schemas.openxmlformats.org/drawingml/2006/main"/>
+          <a:p xmlns:a="http://schemas.openxmlformats.org/drawingml/2006/main">
+            <a:r>
+              <a:rPr lang="en-US" sz="1400" b="0">
+                <a:solidFill>
+                  <a:srgbClr val="A0C4E8"/>
+                </a:solidFill>
+                <a:latin typeface="Calibri"/>
+                <a:ea typeface="Calibri"/>
+              </a:rPr>
+              <a:t>Pattern: Design-doc / RFC options table + residual risk</a:t>
+            </a:r>
+          </a:p>
+        </p:txBody>
+      </p:sp>
+      <p:sp>
+        <p:nvSpPr>
+          <p:cNvPr id="100004" name="TextBox 5"/>
           <p:cNvSpPr txBox="1"/>
           <p:nvPr/>
         </p:nvSpPr>
@@ -1261,6 +1385,279 @@
 </file>
 
 <file path=ppt/slides/slide2.xml><?xml version="1.0" encoding="utf-8"?>
+<p:sld xmlns:p="http://schemas.openxmlformats.org/presentationml/2006/main">
+  <p:cSld name="Pattern provenance">
+    <p:bg>
+      <p:bgPr>
+        <a:solidFill xmlns:a="http://schemas.openxmlformats.org/drawingml/2006/main">
+          <a:srgbClr val="F4F7FC"/>
+        </a:solidFill>
+      </p:bgPr>
+    </p:bg>
+    <p:spTree>
+      <p:nvGrpSpPr>
+        <p:cNvPr id="1" name=""/>
+        <p:cNvGrpSpPr/>
+        <p:nvPr/>
+      </p:nvGrpSpPr>
+      <p:grpSpPr/>
+      <p:sp>
+        <p:nvSpPr>
+          <p:cNvPr id="100005" name="TextBox 1"/>
+          <p:cNvSpPr txBox="1"/>
+          <p:nvPr/>
+        </p:nvSpPr>
+        <p:spPr>
+          <a:xfrm xmlns:a="http://schemas.openxmlformats.org/drawingml/2006/main">
+            <a:off x="504000" y="270000"/>
+            <a:ext cx="11088000" cy="270000"/>
+          </a:xfrm>
+          <a:prstGeom xmlns:a="http://schemas.openxmlformats.org/drawingml/2006/main" prst="rect">
+            <a:avLst/>
+          </a:prstGeom>
+        </p:spPr>
+        <p:txBody>
+          <a:bodyPr xmlns:a="http://schemas.openxmlformats.org/drawingml/2006/main"/>
+          <a:lstStyle xmlns:a="http://schemas.openxmlformats.org/drawingml/2006/main"/>
+          <a:p xmlns:a="http://schemas.openxmlformats.org/drawingml/2006/main">
+            <a:r>
+              <a:rPr lang="en-US" sz="1100" b="1">
+                <a:solidFill>
+                  <a:srgbClr val="2B6CB0"/>
+                </a:solidFill>
+                <a:latin typeface="Calibri"/>
+                <a:ea typeface="Calibri"/>
+              </a:rPr>
+              <a:t>WHERE THIS DECK SHAPE COMES FROM</a:t>
+            </a:r>
+          </a:p>
+        </p:txBody>
+      </p:sp>
+      <p:sp>
+        <p:nvSpPr>
+          <p:cNvPr id="100006" name="TextBox 2"/>
+          <p:cNvSpPr txBox="1"/>
+          <p:nvPr/>
+        </p:nvSpPr>
+        <p:spPr>
+          <a:xfrm xmlns:a="http://schemas.openxmlformats.org/drawingml/2006/main">
+            <a:off x="504000" y="558000"/>
+            <a:ext cx="11088000" cy="612000"/>
+          </a:xfrm>
+          <a:prstGeom xmlns:a="http://schemas.openxmlformats.org/drawingml/2006/main" prst="rect">
+            <a:avLst/>
+          </a:prstGeom>
+        </p:spPr>
+        <p:txBody>
+          <a:bodyPr xmlns:a="http://schemas.openxmlformats.org/drawingml/2006/main"/>
+          <a:lstStyle xmlns:a="http://schemas.openxmlformats.org/drawingml/2006/main"/>
+          <a:p xmlns:a="http://schemas.openxmlformats.org/drawingml/2006/main">
+            <a:r>
+              <a:rPr lang="en-US" sz="2800" b="1">
+                <a:solidFill>
+                  <a:srgbClr val="1A202C"/>
+                </a:solidFill>
+                <a:latin typeface="Calibri"/>
+                <a:ea typeface="Calibri"/>
+              </a:rPr>
+              <a:t>Pattern provenance</a:t>
+            </a:r>
+          </a:p>
+        </p:txBody>
+      </p:sp>
+      <p:sp>
+        <p:nvSpPr>
+          <p:cNvPr id="100007" name="TextBox 3"/>
+          <p:cNvSpPr txBox="1"/>
+          <p:nvPr/>
+        </p:nvSpPr>
+        <p:spPr>
+          <a:xfrm xmlns:a="http://schemas.openxmlformats.org/drawingml/2006/main">
+            <a:off x="504000" y="1260000"/>
+            <a:ext cx="11088000" cy="4860000"/>
+          </a:xfrm>
+          <a:prstGeom xmlns:a="http://schemas.openxmlformats.org/drawingml/2006/main" prst="rect">
+            <a:avLst/>
+          </a:prstGeom>
+          <a:solidFill xmlns:a="http://schemas.openxmlformats.org/drawingml/2006/main">
+            <a:srgbClr val="FFFFFF"/>
+          </a:solidFill>
+        </p:spPr>
+        <p:txBody>
+          <a:bodyPr xmlns:a="http://schemas.openxmlformats.org/drawingml/2006/main"/>
+          <a:lstStyle xmlns:a="http://schemas.openxmlformats.org/drawingml/2006/main"/>
+          <a:p xmlns:a="http://schemas.openxmlformats.org/drawingml/2006/main">
+            <a:r>
+              <a:rPr lang="en-US" sz="1500" b="0">
+                <a:solidFill>
+                  <a:srgbClr val="1A202C"/>
+                </a:solidFill>
+                <a:latin typeface="Calibri"/>
+                <a:ea typeface="Calibri"/>
+              </a:rPr>
+              <a:t>Public pattern (structure only — not a confidential company deck):</a:t>
+            </a:r>
+          </a:p>
+          <a:p xmlns:a="http://schemas.openxmlformats.org/drawingml/2006/main">
+            <a:r>
+              <a:rPr lang="en-US" sz="1500" b="0">
+                <a:solidFill>
+                  <a:srgbClr val="1A202C"/>
+                </a:solidFill>
+                <a:latin typeface="Calibri"/>
+                <a:ea typeface="Calibri"/>
+              </a:rPr>
+              <a:t/>
+            </a:r>
+          </a:p>
+          <a:p xmlns:a="http://schemas.openxmlformats.org/drawingml/2006/main">
+            <a:r>
+              <a:rPr lang="en-US" sz="1500" b="0">
+                <a:solidFill>
+                  <a:srgbClr val="1A202C"/>
+                </a:solidFill>
+                <a:latin typeface="Calibri"/>
+                <a:ea typeface="Calibri"/>
+              </a:rPr>
+              <a:t>Design-doc / RFC options table + residual risk</a:t>
+            </a:r>
+          </a:p>
+          <a:p xmlns:a="http://schemas.openxmlformats.org/drawingml/2006/main">
+            <a:r>
+              <a:rPr lang="en-US" sz="1500" b="0">
+                <a:solidFill>
+                  <a:srgbClr val="1A202C"/>
+                </a:solidFill>
+                <a:latin typeface="Calibri"/>
+                <a:ea typeface="Calibri"/>
+              </a:rPr>
+              <a:t/>
+            </a:r>
+          </a:p>
+          <a:p xmlns:a="http://schemas.openxmlformats.org/drawingml/2006/main">
+            <a:r>
+              <a:rPr lang="en-US" sz="1500" b="0">
+                <a:solidFill>
+                  <a:srgbClr val="1A202C"/>
+                </a:solidFill>
+                <a:latin typeface="Calibri"/>
+                <a:ea typeface="Calibri"/>
+              </a:rPr>
+              <a:t>• StaffEng — Writing engineering strategy</a:t>
+            </a:r>
+          </a:p>
+          <a:p xmlns:a="http://schemas.openxmlformats.org/drawingml/2006/main">
+            <a:r>
+              <a:rPr lang="en-US" sz="1500" b="0">
+                <a:solidFill>
+                  <a:srgbClr val="1A202C"/>
+                </a:solidFill>
+                <a:latin typeface="Calibri"/>
+                <a:ea typeface="Calibri"/>
+              </a:rPr>
+              <a:t>  https://staffeng.com/guides/engineering-strategy/</a:t>
+            </a:r>
+          </a:p>
+          <a:p xmlns:a="http://schemas.openxmlformats.org/drawingml/2006/main">
+            <a:r>
+              <a:rPr lang="en-US" sz="1500" b="0">
+                <a:solidFill>
+                  <a:srgbClr val="1A202C"/>
+                </a:solidFill>
+                <a:latin typeface="Calibri"/>
+                <a:ea typeface="Calibri"/>
+              </a:rPr>
+              <a:t>• Utterskills — options instead of single conclusion</a:t>
+            </a:r>
+          </a:p>
+          <a:p xmlns:a="http://schemas.openxmlformats.org/drawingml/2006/main">
+            <a:r>
+              <a:rPr lang="en-US" sz="1500" b="0">
+                <a:solidFill>
+                  <a:srgbClr val="1A202C"/>
+                </a:solidFill>
+                <a:latin typeface="Calibri"/>
+                <a:ea typeface="Calibri"/>
+              </a:rPr>
+              <a:t>  https://utterskills.com/blog/communication-skills-for-software-engineers</a:t>
+            </a:r>
+          </a:p>
+          <a:p xmlns:a="http://schemas.openxmlformats.org/drawingml/2006/main">
+            <a:r>
+              <a:rPr lang="en-US" sz="1500" b="0">
+                <a:solidFill>
+                  <a:srgbClr val="1A202C"/>
+                </a:solidFill>
+                <a:latin typeface="Calibri"/>
+                <a:ea typeface="Calibri"/>
+              </a:rPr>
+              <a:t/>
+            </a:r>
+          </a:p>
+          <a:p xmlns:a="http://schemas.openxmlformats.org/drawingml/2006/main">
+            <a:r>
+              <a:rPr lang="en-US" sz="1500" b="0">
+                <a:solidFill>
+                  <a:srgbClr val="1A202C"/>
+                </a:solidFill>
+                <a:latin typeface="Calibri"/>
+                <a:ea typeface="Calibri"/>
+              </a:rPr>
+              <a:t>How to use: copy section order and decision verbs; replace with your metrics.</a:t>
+            </a:r>
+          </a:p>
+          <a:p xmlns:a="http://schemas.openxmlformats.org/drawingml/2006/main">
+            <a:r>
+              <a:rPr lang="en-US" sz="1500" b="0">
+                <a:solidFill>
+                  <a:srgbClr val="1A202C"/>
+                </a:solidFill>
+                <a:latin typeface="Calibri"/>
+                <a:ea typeface="Calibri"/>
+              </a:rPr>
+              <a:t>In-repo: skills/presentations/classic-public-cases.md</a:t>
+            </a:r>
+          </a:p>
+        </p:txBody>
+      </p:sp>
+      <p:sp>
+        <p:nvSpPr>
+          <p:cNvPr id="100008" name="TextBox 4"/>
+          <p:cNvSpPr txBox="1"/>
+          <p:nvPr/>
+        </p:nvSpPr>
+        <p:spPr>
+          <a:xfrm xmlns:a="http://schemas.openxmlformats.org/drawingml/2006/main">
+            <a:off x="504000" y="6426000"/>
+            <a:ext cx="11088000" cy="306000"/>
+          </a:xfrm>
+          <a:prstGeom xmlns:a="http://schemas.openxmlformats.org/drawingml/2006/main" prst="rect">
+            <a:avLst/>
+          </a:prstGeom>
+        </p:spPr>
+        <p:txBody>
+          <a:bodyPr xmlns:a="http://schemas.openxmlformats.org/drawingml/2006/main"/>
+          <a:lstStyle xmlns:a="http://schemas.openxmlformats.org/drawingml/2006/main"/>
+          <a:p xmlns:a="http://schemas.openxmlformats.org/drawingml/2006/main">
+            <a:r>
+              <a:rPr lang="en-US" sz="1100" b="0">
+                <a:solidFill>
+                  <a:srgbClr val="718096"/>
+                </a:solidFill>
+                <a:latin typeface="Calibri"/>
+                <a:ea typeface="Calibri"/>
+              </a:rPr>
+              <a:t>Team X  ·  Program Alpha  ·  Qn YYYY  ·  TEMPLATE — replace placeholders</a:t>
+            </a:r>
+          </a:p>
+        </p:txBody>
+      </p:sp>
+    </p:spTree>
+  </p:cSld>
+</p:sld>
+</file>
+
+<file path=ppt/slides/slide3.xml><?xml version="1.0" encoding="utf-8"?>
 <p:sld xmlns:p="http://schemas.openxmlformats.org/presentationml/2006/main">
   <p:cSld name="BLUF — decision needed">
     <p:bg>
@@ -1279,7 +1676,7 @@
       <p:grpSpPr/>
       <p:sp>
         <p:nvSpPr>
-          <p:cNvPr id="100004" name="TextBox 1"/>
+          <p:cNvPr id="100009" name="TextBox 1"/>
           <p:cNvSpPr txBox="1"/>
           <p:nvPr/>
         </p:nvSpPr>
@@ -1311,7 +1708,7 @@
       </p:sp>
       <p:sp>
         <p:nvSpPr>
-          <p:cNvPr id="100005" name="TextBox 2"/>
+          <p:cNvPr id="100010" name="TextBox 2"/>
           <p:cNvSpPr txBox="1"/>
           <p:nvPr/>
         </p:nvSpPr>
@@ -1343,7 +1740,7 @@
       </p:sp>
       <p:sp>
         <p:nvSpPr>
-          <p:cNvPr id="100006" name="TextBox 3"/>
+          <p:cNvPr id="100011" name="TextBox 3"/>
           <p:cNvSpPr txBox="1"/>
           <p:nvPr/>
         </p:nvSpPr>
@@ -1378,7 +1775,7 @@
       </p:sp>
       <p:sp>
         <p:nvSpPr>
-          <p:cNvPr id="100007" name="TextBox 4"/>
+          <p:cNvPr id="100012" name="TextBox 4"/>
           <p:cNvSpPr txBox="1"/>
           <p:nvPr/>
         </p:nvSpPr>
@@ -1485,7 +1882,7 @@
       </p:sp>
       <p:sp>
         <p:nvSpPr>
-          <p:cNvPr id="100008" name="TextBox 5"/>
+          <p:cNvPr id="100013" name="TextBox 5"/>
           <p:cNvSpPr txBox="1"/>
           <p:nvPr/>
         </p:nvSpPr>
@@ -1520,7 +1917,7 @@
 </p:sld>
 </file>
 
-<file path=ppt/slides/slide3.xml><?xml version="1.0" encoding="utf-8"?>
+<file path=ppt/slides/slide4.xml><?xml version="1.0" encoding="utf-8"?>
 <p:sld xmlns:p="http://schemas.openxmlformats.org/presentationml/2006/main">
   <p:cSld name="Problem, goal, constraints">
     <p:bg>
@@ -1539,7 +1936,7 @@
       <p:grpSpPr/>
       <p:sp>
         <p:nvSpPr>
-          <p:cNvPr id="100009" name="TextBox 1"/>
+          <p:cNvPr id="100014" name="TextBox 1"/>
           <p:cNvSpPr txBox="1"/>
           <p:nvPr/>
         </p:nvSpPr>
@@ -1571,7 +1968,7 @@
       </p:sp>
       <p:sp>
         <p:nvSpPr>
-          <p:cNvPr id="100010" name="TextBox 2"/>
+          <p:cNvPr id="100015" name="TextBox 2"/>
           <p:cNvSpPr txBox="1"/>
           <p:nvPr/>
         </p:nvSpPr>
@@ -1678,7 +2075,7 @@
       </p:sp>
       <p:sp>
         <p:nvSpPr>
-          <p:cNvPr id="100011" name="TextBox 3"/>
+          <p:cNvPr id="100016" name="TextBox 3"/>
           <p:cNvSpPr txBox="1"/>
           <p:nvPr/>
         </p:nvSpPr>
@@ -1713,7 +2110,7 @@
 </p:sld>
 </file>
 
-<file path=ppt/slides/slide4.xml><?xml version="1.0" encoding="utf-8"?>
+<file path=ppt/slides/slide5.xml><?xml version="1.0" encoding="utf-8"?>
 <p:sld xmlns:p="http://schemas.openxmlformats.org/presentationml/2006/main">
   <p:cSld name="Design sketch (one page)">
     <p:bg>
@@ -1732,7 +2129,7 @@
       <p:grpSpPr/>
       <p:sp>
         <p:nvSpPr>
-          <p:cNvPr id="100012" name="TextBox 1"/>
+          <p:cNvPr id="100017" name="TextBox 1"/>
           <p:cNvSpPr txBox="1"/>
           <p:nvPr/>
         </p:nvSpPr>
@@ -1764,7 +2161,7 @@
       </p:sp>
       <p:sp>
         <p:nvSpPr>
-          <p:cNvPr id="100013" name="TextBox 2"/>
+          <p:cNvPr id="100018" name="TextBox 2"/>
           <p:cNvSpPr txBox="1"/>
           <p:nvPr/>
         </p:nvSpPr>
@@ -1871,7 +2268,7 @@
       </p:sp>
       <p:sp>
         <p:nvSpPr>
-          <p:cNvPr id="100014" name="TextBox 3"/>
+          <p:cNvPr id="100019" name="TextBox 3"/>
           <p:cNvSpPr txBox="1"/>
           <p:nvPr/>
         </p:nvSpPr>
@@ -1906,7 +2303,7 @@
 </p:sld>
 </file>
 
-<file path=ppt/slides/slide5.xml><?xml version="1.0" encoding="utf-8"?>
+<file path=ppt/slides/slide6.xml><?xml version="1.0" encoding="utf-8"?>
 <p:sld xmlns:p="http://schemas.openxmlformats.org/presentationml/2006/main">
   <p:cSld name="Risks &amp; mitigations (top 3)">
     <p:bg>
@@ -1925,7 +2322,7 @@
       <p:grpSpPr/>
       <p:sp>
         <p:nvSpPr>
-          <p:cNvPr id="100015" name="TextBox 1"/>
+          <p:cNvPr id="100020" name="TextBox 1"/>
           <p:cNvSpPr txBox="1"/>
           <p:nvPr/>
         </p:nvSpPr>
@@ -1957,7 +2354,7 @@
       </p:sp>
       <p:sp>
         <p:nvSpPr>
-          <p:cNvPr id="100016" name="TextBox 2"/>
+          <p:cNvPr id="100021" name="TextBox 2"/>
           <p:cNvSpPr txBox="1"/>
           <p:nvPr/>
         </p:nvSpPr>
@@ -2040,7 +2437,7 @@
       </p:sp>
       <p:sp>
         <p:nvSpPr>
-          <p:cNvPr id="100017" name="TextBox 3"/>
+          <p:cNvPr id="100022" name="TextBox 3"/>
           <p:cNvSpPr txBox="1"/>
           <p:nvPr/>
         </p:nvSpPr>
@@ -2075,7 +2472,7 @@
 </p:sld>
 </file>
 
-<file path=ppt/slides/slide6.xml><?xml version="1.0" encoding="utf-8"?>
+<file path=ppt/slides/slide7.xml><?xml version="1.0" encoding="utf-8"?>
 <p:sld xmlns:p="http://schemas.openxmlformats.org/presentationml/2006/main">
   <p:cSld name="Options &amp; recommendation">
     <p:bg>
@@ -2094,7 +2491,7 @@
       <p:grpSpPr/>
       <p:sp>
         <p:nvSpPr>
-          <p:cNvPr id="100018" name="TextBox 1"/>
+          <p:cNvPr id="100023" name="TextBox 1"/>
           <p:cNvSpPr txBox="1"/>
           <p:nvPr/>
         </p:nvSpPr>
@@ -2126,7 +2523,7 @@
       </p:sp>
       <p:sp>
         <p:nvSpPr>
-          <p:cNvPr id="100019" name="TextBox 2"/>
+          <p:cNvPr id="100024" name="TextBox 2"/>
           <p:cNvSpPr txBox="1"/>
           <p:nvPr/>
         </p:nvSpPr>
@@ -2158,7 +2555,7 @@
       </p:sp>
       <p:graphicFrame>
         <p:nvGraphicFramePr>
-          <p:cNvPr id="100020" name="Table 1"/>
+          <p:cNvPr id="100025" name="Table 1"/>
           <p:cNvGraphicFramePr/>
           <p:nvPr/>
         </p:nvGraphicFramePr>
@@ -2651,7 +3048,7 @@
       </p:graphicFrame>
       <p:sp>
         <p:nvSpPr>
-          <p:cNvPr id="100021" name="TextBox 3"/>
+          <p:cNvPr id="100026" name="TextBox 3"/>
           <p:cNvSpPr txBox="1"/>
           <p:nvPr/>
         </p:nvSpPr>
@@ -2686,7 +3083,7 @@
 </p:sld>
 </file>
 
-<file path=ppt/slides/slide7.xml><?xml version="1.0" encoding="utf-8"?>
+<file path=ppt/slides/slide8.xml><?xml version="1.0" encoding="utf-8"?>
 <p:sld xmlns:p="http://schemas.openxmlformats.org/presentationml/2006/main">
   <p:cSld name="Decision &amp; ask">
     <p:bg>
@@ -2705,7 +3102,7 @@
       <p:grpSpPr/>
       <p:sp>
         <p:nvSpPr>
-          <p:cNvPr id="100022" name="TextBox 1"/>
+          <p:cNvPr id="100027" name="TextBox 1"/>
           <p:cNvSpPr txBox="1"/>
           <p:nvPr/>
         </p:nvSpPr>
@@ -2737,7 +3134,7 @@
       </p:sp>
       <p:sp>
         <p:nvSpPr>
-          <p:cNvPr id="100023" name="TextBox 2"/>
+          <p:cNvPr id="100028" name="TextBox 2"/>
           <p:cNvSpPr txBox="1"/>
           <p:nvPr/>
         </p:nvSpPr>
@@ -2769,7 +3166,7 @@
       </p:sp>
       <p:sp>
         <p:nvSpPr>
-          <p:cNvPr id="100024" name="TextBox 3"/>
+          <p:cNvPr id="100029" name="TextBox 3"/>
           <p:cNvSpPr txBox="1"/>
           <p:nvPr/>
         </p:nvSpPr>
@@ -2852,7 +3249,7 @@
       </p:sp>
       <p:sp>
         <p:nvSpPr>
-          <p:cNvPr id="100025" name="TextBox 4"/>
+          <p:cNvPr id="100030" name="TextBox 4"/>
           <p:cNvSpPr txBox="1"/>
           <p:nvPr/>
         </p:nvSpPr>

--- a/skills/presentations/assets/pptx/templates/01-technical-review.pptx
+++ b/skills/presentations/assets/pptx/templates/01-technical-review.pptx
@@ -5,17 +5,17 @@
     <p:sldMasterId xmlns:r="http://schemas.openxmlformats.org/officeDocument/2006/relationships" id="2147483648" r:id="rId1"/>
   </p:sldMasterIdLst>
   <p:notesMasterIdLst>
-    <p:notesMasterId r:id="Re4e29a20510c4cf2"/>
+    <p:notesMasterId r:id="R68f5fce147414935"/>
   </p:notesMasterIdLst>
   <p:sldIdLst>
-    <p:sldId id="256" r:id="Rc493580404c142de"/>
-    <p:sldId id="257" r:id="R30a1b1548477498e"/>
-    <p:sldId id="258" r:id="Rf06d30fcef5d459b"/>
-    <p:sldId id="259" r:id="R9dfd551c33a040a5"/>
-    <p:sldId id="260" r:id="R35b3c9c39fa0410f"/>
-    <p:sldId id="261" r:id="R4f947e2e6aed4849"/>
-    <p:sldId id="262" r:id="R7e9c3d3db7dc4d08"/>
-    <p:sldId id="263" r:id="Rca92b01bf5f748de"/>
+    <p:sldId id="256" r:id="R86888ffaae5843cc"/>
+    <p:sldId id="257" r:id="R844cca510b0a4df7"/>
+    <p:sldId id="258" r:id="R5e588d657dec45ba"/>
+    <p:sldId id="259" r:id="R88701f219a594d5a"/>
+    <p:sldId id="260" r:id="R7e32200a82804ce8"/>
+    <p:sldId id="261" r:id="R6ba9ecba35df4407"/>
+    <p:sldId id="262" r:id="Rf007fe8ba12749d5"/>
+    <p:sldId id="263" r:id="R3241f4d05ad64d20"/>
   </p:sldIdLst>
   <p:sldSz cx="12192000" cy="6858000"/>
   <p:notesSz cx="6858000" cy="9144000"/>
@@ -1615,7 +1615,19 @@
                 <a:latin typeface="Calibri"/>
                 <a:ea typeface="Calibri"/>
               </a:rPr>
-              <a:t>In-repo: skills/presentations/classic-public-cases.md</a:t>
+              <a:t>CONTENT TEMPLATE ONLY — do not copy visual design (colors, margins, fonts) as a brand system.</a:t>
+            </a:r>
+          </a:p>
+          <a:p xmlns:a="http://schemas.openxmlformats.org/drawingml/2006/main">
+            <a:r>
+              <a:rPr lang="en-US" sz="1500" b="0">
+                <a:solidFill>
+                  <a:srgbClr val="1A202C"/>
+                </a:solidFill>
+                <a:latin typeface="Calibri"/>
+                <a:ea typeface="Calibri"/>
+              </a:rPr>
+              <a:t>In-repo: skills/presentations/classic-public-cases.md · assets/README.md (agent notice)</a:t>
             </a:r>
           </a:p>
         </p:txBody>
